--- a/Project/ms-elevate Border_Defence_Final.pptx
+++ b/Project/ms-elevate Border_Defence_Final.pptx
@@ -2469,8 +2469,9 @@
                 <a:latin typeface="Franklin Gothic Medium" pitchFamily="34" charset="0"/>
                 <a:ea typeface="Franklin Gothic Medium" pitchFamily="34" charset="-122"/>
                 <a:cs typeface="Franklin Gothic Medium" pitchFamily="34" charset="-120"/>
-              </a:rPr>
-              <a:t>https://github.com/jainilgupta02/Border-Surveillance-Project</a:t>
+                <a:hlinkClick r:id="rId4"/>
+              </a:rPr>
+              <a:t>jainilgupta02</a:t>
             </a:r>
             <a:endParaRPr lang="en-US" sz="1800" dirty="0"/>
           </a:p>
